--- a/analysis_dnn/results_summary.pptx
+++ b/analysis_dnn/results_summary.pptx
@@ -10,6 +10,10 @@
     <p:sldId id="258" r:id="rId4"/>
     <p:sldId id="259" r:id="rId5"/>
     <p:sldId id="260" r:id="rId6"/>
+    <p:sldId id="261" r:id="rId7"/>
+    <p:sldId id="262" r:id="rId8"/>
+    <p:sldId id="263" r:id="rId9"/>
+    <p:sldId id="264" r:id="rId10"/>
   </p:sldIdLst>
   <p:sldSz cx="12192000" cy="6858000"/>
   <p:notesSz cx="6858000" cy="9144000"/>
@@ -108,6 +112,11 @@
       </a:defRPr>
     </a:lvl9pPr>
   </p:defaultTextStyle>
+  <p:extLst>
+    <p:ext uri="{EFAFB233-063F-42B5-8137-9DF3F51BA10A}">
+      <p15:sldGuideLst xmlns:p15="http://schemas.microsoft.com/office/powerpoint/2012/main"/>
+    </p:ext>
+  </p:extLst>
 </p:presentation>
 </file>
 
@@ -260,7 +269,7 @@
           <a:p>
             <a:fld id="{3566A419-5D01-774F-9FCD-B2AD8577F539}" type="datetimeFigureOut">
               <a:rPr lang="en-GB" smtClean="0"/>
-              <a:t>13/10/2026</a:t>
+              <a:t>19/10/2026</a:t>
             </a:fld>
             <a:endParaRPr lang="en-GB"/>
           </a:p>
@@ -460,7 +469,7 @@
           <a:p>
             <a:fld id="{3566A419-5D01-774F-9FCD-B2AD8577F539}" type="datetimeFigureOut">
               <a:rPr lang="en-GB" smtClean="0"/>
-              <a:t>13/10/2026</a:t>
+              <a:t>19/10/2026</a:t>
             </a:fld>
             <a:endParaRPr lang="en-GB"/>
           </a:p>
@@ -670,7 +679,7 @@
           <a:p>
             <a:fld id="{3566A419-5D01-774F-9FCD-B2AD8577F539}" type="datetimeFigureOut">
               <a:rPr lang="en-GB" smtClean="0"/>
-              <a:t>13/10/2026</a:t>
+              <a:t>19/10/2026</a:t>
             </a:fld>
             <a:endParaRPr lang="en-GB"/>
           </a:p>
@@ -870,7 +879,7 @@
           <a:p>
             <a:fld id="{3566A419-5D01-774F-9FCD-B2AD8577F539}" type="datetimeFigureOut">
               <a:rPr lang="en-GB" smtClean="0"/>
-              <a:t>13/10/2026</a:t>
+              <a:t>19/10/2026</a:t>
             </a:fld>
             <a:endParaRPr lang="en-GB"/>
           </a:p>
@@ -1146,7 +1155,7 @@
           <a:p>
             <a:fld id="{3566A419-5D01-774F-9FCD-B2AD8577F539}" type="datetimeFigureOut">
               <a:rPr lang="en-GB" smtClean="0"/>
-              <a:t>13/10/2026</a:t>
+              <a:t>19/10/2026</a:t>
             </a:fld>
             <a:endParaRPr lang="en-GB"/>
           </a:p>
@@ -1414,7 +1423,7 @@
           <a:p>
             <a:fld id="{3566A419-5D01-774F-9FCD-B2AD8577F539}" type="datetimeFigureOut">
               <a:rPr lang="en-GB" smtClean="0"/>
-              <a:t>13/10/2026</a:t>
+              <a:t>19/10/2026</a:t>
             </a:fld>
             <a:endParaRPr lang="en-GB"/>
           </a:p>
@@ -1829,7 +1838,7 @@
           <a:p>
             <a:fld id="{3566A419-5D01-774F-9FCD-B2AD8577F539}" type="datetimeFigureOut">
               <a:rPr lang="en-GB" smtClean="0"/>
-              <a:t>13/10/2026</a:t>
+              <a:t>19/10/2026</a:t>
             </a:fld>
             <a:endParaRPr lang="en-GB"/>
           </a:p>
@@ -1971,7 +1980,7 @@
           <a:p>
             <a:fld id="{3566A419-5D01-774F-9FCD-B2AD8577F539}" type="datetimeFigureOut">
               <a:rPr lang="en-GB" smtClean="0"/>
-              <a:t>13/10/2026</a:t>
+              <a:t>19/10/2026</a:t>
             </a:fld>
             <a:endParaRPr lang="en-GB"/>
           </a:p>
@@ -2084,7 +2093,7 @@
           <a:p>
             <a:fld id="{3566A419-5D01-774F-9FCD-B2AD8577F539}" type="datetimeFigureOut">
               <a:rPr lang="en-GB" smtClean="0"/>
-              <a:t>13/10/2026</a:t>
+              <a:t>19/10/2026</a:t>
             </a:fld>
             <a:endParaRPr lang="en-GB"/>
           </a:p>
@@ -2397,7 +2406,7 @@
           <a:p>
             <a:fld id="{3566A419-5D01-774F-9FCD-B2AD8577F539}" type="datetimeFigureOut">
               <a:rPr lang="en-GB" smtClean="0"/>
-              <a:t>13/10/2026</a:t>
+              <a:t>19/10/2026</a:t>
             </a:fld>
             <a:endParaRPr lang="en-GB"/>
           </a:p>
@@ -2686,7 +2695,7 @@
           <a:p>
             <a:fld id="{3566A419-5D01-774F-9FCD-B2AD8577F539}" type="datetimeFigureOut">
               <a:rPr lang="en-GB" smtClean="0"/>
-              <a:t>13/10/2026</a:t>
+              <a:t>19/10/2026</a:t>
             </a:fld>
             <a:endParaRPr lang="en-GB"/>
           </a:p>
@@ -2929,7 +2938,7 @@
           <a:p>
             <a:fld id="{3566A419-5D01-774F-9FCD-B2AD8577F539}" type="datetimeFigureOut">
               <a:rPr lang="en-GB" smtClean="0"/>
-              <a:t>13/10/2026</a:t>
+              <a:t>19/10/2026</a:t>
             </a:fld>
             <a:endParaRPr lang="en-GB"/>
           </a:p>
@@ -3957,6 +3966,584 @@
     <p:extLst>
       <p:ext uri="{BB962C8B-B14F-4D97-AF65-F5344CB8AC3E}">
         <p14:creationId xmlns:p14="http://schemas.microsoft.com/office/powerpoint/2010/main" val="2922702972"/>
+      </p:ext>
+    </p:extLst>
+  </p:cSld>
+  <p:clrMapOvr>
+    <a:masterClrMapping/>
+  </p:clrMapOvr>
+</p:sld>
+</file>
+
+<file path=ppt/slides/slide6.xml><?xml version="1.0" encoding="utf-8"?>
+<p:sld xmlns:a="http://schemas.openxmlformats.org/drawingml/2006/main" xmlns:r="http://schemas.openxmlformats.org/officeDocument/2006/relationships" xmlns:p="http://schemas.openxmlformats.org/presentationml/2006/main">
+  <p:cSld>
+    <p:spTree>
+      <p:nvGrpSpPr>
+        <p:cNvPr id="1" name=""/>
+        <p:cNvGrpSpPr/>
+        <p:nvPr/>
+      </p:nvGrpSpPr>
+      <p:grpSpPr>
+        <a:xfrm>
+          <a:off x="0" y="0"/>
+          <a:ext cx="0" cy="0"/>
+          <a:chOff x="0" y="0"/>
+          <a:chExt cx="0" cy="0"/>
+        </a:xfrm>
+      </p:grpSpPr>
+      <p:sp>
+        <p:nvSpPr>
+          <p:cNvPr id="2" name="pole tekstowe 1">
+            <a:extLst>
+              <a:ext uri="{FF2B5EF4-FFF2-40B4-BE49-F238E27FC236}">
+                <a16:creationId xmlns:a16="http://schemas.microsoft.com/office/drawing/2014/main" id="{5983ED49-19B6-588C-8519-9E95A12F485C}"/>
+              </a:ext>
+            </a:extLst>
+          </p:cNvPr>
+          <p:cNvSpPr txBox="1"/>
+          <p:nvPr/>
+        </p:nvSpPr>
+        <p:spPr>
+          <a:xfrm>
+            <a:off x="580768" y="308919"/>
+            <a:ext cx="4744994" cy="923330"/>
+          </a:xfrm>
+          <a:prstGeom prst="rect">
+            <a:avLst/>
+          </a:prstGeom>
+          <a:noFill/>
+        </p:spPr>
+        <p:txBody>
+          <a:bodyPr wrap="square" rtlCol="0">
+            <a:spAutoFit/>
+          </a:bodyPr>
+          <a:lstStyle/>
+          <a:p>
+            <a:r>
+              <a:rPr lang="en-GB" dirty="0"/>
+              <a:t>when the model gets also to tones from Marlen’s experiment in the training, downward trend is gone. </a:t>
+            </a:r>
+          </a:p>
+        </p:txBody>
+      </p:sp>
+      <p:pic>
+        <p:nvPicPr>
+          <p:cNvPr id="4" name="Obraz 3">
+            <a:extLst>
+              <a:ext uri="{FF2B5EF4-FFF2-40B4-BE49-F238E27FC236}">
+                <a16:creationId xmlns:a16="http://schemas.microsoft.com/office/drawing/2014/main" id="{F6E23612-36C7-E537-88BD-3C223A32AF78}"/>
+              </a:ext>
+            </a:extLst>
+          </p:cNvPr>
+          <p:cNvPicPr>
+            <a:picLocks noChangeAspect="1"/>
+          </p:cNvPicPr>
+          <p:nvPr/>
+        </p:nvPicPr>
+        <p:blipFill>
+          <a:blip r:embed="rId2"/>
+          <a:stretch>
+            <a:fillRect/>
+          </a:stretch>
+        </p:blipFill>
+        <p:spPr>
+          <a:xfrm>
+            <a:off x="3810000" y="1143000"/>
+            <a:ext cx="4572000" cy="4572000"/>
+          </a:xfrm>
+          <a:prstGeom prst="rect">
+            <a:avLst/>
+          </a:prstGeom>
+        </p:spPr>
+      </p:pic>
+    </p:spTree>
+    <p:extLst>
+      <p:ext uri="{BB962C8B-B14F-4D97-AF65-F5344CB8AC3E}">
+        <p14:creationId xmlns:p14="http://schemas.microsoft.com/office/powerpoint/2010/main" val="3285274594"/>
+      </p:ext>
+    </p:extLst>
+  </p:cSld>
+  <p:clrMapOvr>
+    <a:masterClrMapping/>
+  </p:clrMapOvr>
+</p:sld>
+</file>
+
+<file path=ppt/slides/slide7.xml><?xml version="1.0" encoding="utf-8"?>
+<p:sld xmlns:a="http://schemas.openxmlformats.org/drawingml/2006/main" xmlns:r="http://schemas.openxmlformats.org/officeDocument/2006/relationships" xmlns:p="http://schemas.openxmlformats.org/presentationml/2006/main">
+  <p:cSld>
+    <p:spTree>
+      <p:nvGrpSpPr>
+        <p:cNvPr id="1" name=""/>
+        <p:cNvGrpSpPr/>
+        <p:nvPr/>
+      </p:nvGrpSpPr>
+      <p:grpSpPr>
+        <a:xfrm>
+          <a:off x="0" y="0"/>
+          <a:ext cx="0" cy="0"/>
+          <a:chOff x="0" y="0"/>
+          <a:chExt cx="0" cy="0"/>
+        </a:xfrm>
+      </p:grpSpPr>
+      <p:sp>
+        <p:nvSpPr>
+          <p:cNvPr id="2" name="Tytuł 1">
+            <a:extLst>
+              <a:ext uri="{FF2B5EF4-FFF2-40B4-BE49-F238E27FC236}">
+                <a16:creationId xmlns:a16="http://schemas.microsoft.com/office/drawing/2014/main" id="{66705A45-73F1-FD2D-B82E-78FB6FDEF050}"/>
+              </a:ext>
+            </a:extLst>
+          </p:cNvPr>
+          <p:cNvSpPr>
+            <a:spLocks noGrp="1"/>
+          </p:cNvSpPr>
+          <p:nvPr>
+            <p:ph type="title"/>
+          </p:nvPr>
+        </p:nvSpPr>
+        <p:spPr/>
+        <p:txBody>
+          <a:bodyPr/>
+          <a:lstStyle/>
+          <a:p>
+            <a:endParaRPr lang="en-GB"/>
+          </a:p>
+        </p:txBody>
+      </p:sp>
+      <p:sp>
+        <p:nvSpPr>
+          <p:cNvPr id="3" name="Symbol zastępczy tekstu 2">
+            <a:extLst>
+              <a:ext uri="{FF2B5EF4-FFF2-40B4-BE49-F238E27FC236}">
+                <a16:creationId xmlns:a16="http://schemas.microsoft.com/office/drawing/2014/main" id="{2F47D7F7-53CE-C83F-CF5C-464F0C9C0329}"/>
+              </a:ext>
+            </a:extLst>
+          </p:cNvPr>
+          <p:cNvSpPr>
+            <a:spLocks noGrp="1"/>
+          </p:cNvSpPr>
+          <p:nvPr>
+            <p:ph type="body" idx="1"/>
+          </p:nvPr>
+        </p:nvSpPr>
+        <p:spPr/>
+        <p:txBody>
+          <a:bodyPr/>
+          <a:lstStyle/>
+          <a:p>
+            <a:r>
+              <a:rPr lang="en-GB" dirty="0"/>
+              <a:t>19.10.2026</a:t>
+            </a:r>
+          </a:p>
+        </p:txBody>
+      </p:sp>
+    </p:spTree>
+    <p:extLst>
+      <p:ext uri="{BB962C8B-B14F-4D97-AF65-F5344CB8AC3E}">
+        <p14:creationId xmlns:p14="http://schemas.microsoft.com/office/powerpoint/2010/main" val="3179398985"/>
+      </p:ext>
+    </p:extLst>
+  </p:cSld>
+  <p:clrMapOvr>
+    <a:masterClrMapping/>
+  </p:clrMapOvr>
+</p:sld>
+</file>
+
+<file path=ppt/slides/slide8.xml><?xml version="1.0" encoding="utf-8"?>
+<p:sld xmlns:a="http://schemas.openxmlformats.org/drawingml/2006/main" xmlns:r="http://schemas.openxmlformats.org/officeDocument/2006/relationships" xmlns:p="http://schemas.openxmlformats.org/presentationml/2006/main">
+  <p:cSld>
+    <p:spTree>
+      <p:nvGrpSpPr>
+        <p:cNvPr id="1" name=""/>
+        <p:cNvGrpSpPr/>
+        <p:nvPr/>
+      </p:nvGrpSpPr>
+      <p:grpSpPr>
+        <a:xfrm>
+          <a:off x="0" y="0"/>
+          <a:ext cx="0" cy="0"/>
+          <a:chOff x="0" y="0"/>
+          <a:chExt cx="0" cy="0"/>
+        </a:xfrm>
+      </p:grpSpPr>
+      <p:pic>
+        <p:nvPicPr>
+          <p:cNvPr id="5" name="Obraz 4">
+            <a:extLst>
+              <a:ext uri="{FF2B5EF4-FFF2-40B4-BE49-F238E27FC236}">
+                <a16:creationId xmlns:a16="http://schemas.microsoft.com/office/drawing/2014/main" id="{249CB861-429C-CFB9-6D1B-A0E00B44B863}"/>
+              </a:ext>
+            </a:extLst>
+          </p:cNvPr>
+          <p:cNvPicPr>
+            <a:picLocks noChangeAspect="1"/>
+          </p:cNvPicPr>
+          <p:nvPr/>
+        </p:nvPicPr>
+        <p:blipFill>
+          <a:blip r:embed="rId2"/>
+          <a:stretch>
+            <a:fillRect/>
+          </a:stretch>
+        </p:blipFill>
+        <p:spPr>
+          <a:xfrm>
+            <a:off x="111672" y="1127234"/>
+            <a:ext cx="12080328" cy="4832131"/>
+          </a:xfrm>
+          <a:prstGeom prst="rect">
+            <a:avLst/>
+          </a:prstGeom>
+        </p:spPr>
+      </p:pic>
+    </p:spTree>
+    <p:extLst>
+      <p:ext uri="{BB962C8B-B14F-4D97-AF65-F5344CB8AC3E}">
+        <p14:creationId xmlns:p14="http://schemas.microsoft.com/office/powerpoint/2010/main" val="3226826369"/>
+      </p:ext>
+    </p:extLst>
+  </p:cSld>
+  <p:clrMapOvr>
+    <a:masterClrMapping/>
+  </p:clrMapOvr>
+</p:sld>
+</file>
+
+<file path=ppt/slides/slide9.xml><?xml version="1.0" encoding="utf-8"?>
+<p:sld xmlns:a="http://schemas.openxmlformats.org/drawingml/2006/main" xmlns:r="http://schemas.openxmlformats.org/officeDocument/2006/relationships" xmlns:p="http://schemas.openxmlformats.org/presentationml/2006/main">
+  <p:cSld>
+    <p:bg>
+      <p:bgPr>
+        <a:solidFill>
+          <a:schemeClr val="bg1"/>
+        </a:solidFill>
+        <a:effectLst/>
+      </p:bgPr>
+    </p:bg>
+    <p:spTree>
+      <p:nvGrpSpPr>
+        <p:cNvPr id="1" name=""/>
+        <p:cNvGrpSpPr/>
+        <p:nvPr/>
+      </p:nvGrpSpPr>
+      <p:grpSpPr>
+        <a:xfrm>
+          <a:off x="0" y="0"/>
+          <a:ext cx="0" cy="0"/>
+          <a:chOff x="0" y="0"/>
+          <a:chExt cx="0" cy="0"/>
+        </a:xfrm>
+      </p:grpSpPr>
+      <p:pic>
+        <p:nvPicPr>
+          <p:cNvPr id="5" name="Obraz 4">
+            <a:extLst>
+              <a:ext uri="{FF2B5EF4-FFF2-40B4-BE49-F238E27FC236}">
+                <a16:creationId xmlns:a16="http://schemas.microsoft.com/office/drawing/2014/main" id="{CAC13154-8A78-7777-200B-C15F51C91E0F}"/>
+              </a:ext>
+            </a:extLst>
+          </p:cNvPr>
+          <p:cNvPicPr>
+            <a:picLocks noChangeAspect="1"/>
+          </p:cNvPicPr>
+          <p:nvPr/>
+        </p:nvPicPr>
+        <p:blipFill>
+          <a:blip r:embed="rId2"/>
+          <a:stretch>
+            <a:fillRect/>
+          </a:stretch>
+        </p:blipFill>
+        <p:spPr>
+          <a:xfrm>
+            <a:off x="484632" y="1667367"/>
+            <a:ext cx="3517119" cy="3517119"/>
+          </a:xfrm>
+          <a:prstGeom prst="rect">
+            <a:avLst/>
+          </a:prstGeom>
+        </p:spPr>
+      </p:pic>
+      <p:cxnSp>
+        <p:nvCxnSpPr>
+          <p:cNvPr id="12" name="Straight Connector 11">
+            <a:extLst>
+              <a:ext uri="{FF2B5EF4-FFF2-40B4-BE49-F238E27FC236}">
+                <a16:creationId xmlns:a16="http://schemas.microsoft.com/office/drawing/2014/main" id="{DCD67800-37AC-4E14-89B0-F79DCB3FB86D}"/>
+              </a:ext>
+              <a:ext uri="{C183D7F6-B498-43B3-948B-1728B52AA6E4}">
+                <adec:decorative xmlns:adec="http://schemas.microsoft.com/office/drawing/2017/decorative" val="1"/>
+              </a:ext>
+            </a:extLst>
+          </p:cNvPr>
+          <p:cNvCxnSpPr>
+            <a:cxnSpLocks noGrp="1" noRot="1" noChangeAspect="1" noMove="1" noResize="1" noEditPoints="1" noAdjustHandles="1" noChangeArrowheads="1" noChangeShapeType="1"/>
+          </p:cNvCxnSpPr>
+          <p:nvPr>
+            <p:extLst>
+              <p:ext uri="{386F3935-93C4-4BCD-93E2-E3B085C9AB24}">
+                <p16:designElem xmlns:p16="http://schemas.microsoft.com/office/powerpoint/2015/main" val="1"/>
+              </p:ext>
+            </p:extLst>
+          </p:nvPr>
+        </p:nvCxnSpPr>
+        <p:spPr>
+          <a:xfrm>
+            <a:off x="4165600" y="1573887"/>
+            <a:ext cx="0" cy="3710227"/>
+          </a:xfrm>
+          <a:prstGeom prst="line">
+            <a:avLst/>
+          </a:prstGeom>
+          <a:ln w="19050">
+            <a:solidFill>
+              <a:srgbClr val="7F7F7F"/>
+            </a:solidFill>
+          </a:ln>
+        </p:spPr>
+        <p:style>
+          <a:lnRef idx="1">
+            <a:schemeClr val="accent1"/>
+          </a:lnRef>
+          <a:fillRef idx="0">
+            <a:schemeClr val="accent1"/>
+          </a:fillRef>
+          <a:effectRef idx="0">
+            <a:schemeClr val="accent1"/>
+          </a:effectRef>
+          <a:fontRef idx="minor">
+            <a:schemeClr val="tx1"/>
+          </a:fontRef>
+        </p:style>
+      </p:cxnSp>
+      <p:pic>
+        <p:nvPicPr>
+          <p:cNvPr id="7" name="Obraz 6">
+            <a:extLst>
+              <a:ext uri="{FF2B5EF4-FFF2-40B4-BE49-F238E27FC236}">
+                <a16:creationId xmlns:a16="http://schemas.microsoft.com/office/drawing/2014/main" id="{0053E050-5ED9-05E4-F0E6-616D8F5E3DFB}"/>
+              </a:ext>
+            </a:extLst>
+          </p:cNvPr>
+          <p:cNvPicPr>
+            <a:picLocks noChangeAspect="1"/>
+          </p:cNvPicPr>
+          <p:nvPr/>
+        </p:nvPicPr>
+        <p:blipFill>
+          <a:blip r:embed="rId3"/>
+          <a:stretch>
+            <a:fillRect/>
+          </a:stretch>
+        </p:blipFill>
+        <p:spPr>
+          <a:xfrm>
+            <a:off x="4310676" y="1657254"/>
+            <a:ext cx="3537345" cy="3537345"/>
+          </a:xfrm>
+          <a:prstGeom prst="rect">
+            <a:avLst/>
+          </a:prstGeom>
+        </p:spPr>
+      </p:pic>
+      <p:cxnSp>
+        <p:nvCxnSpPr>
+          <p:cNvPr id="14" name="Straight Connector 13">
+            <a:extLst>
+              <a:ext uri="{FF2B5EF4-FFF2-40B4-BE49-F238E27FC236}">
+                <a16:creationId xmlns:a16="http://schemas.microsoft.com/office/drawing/2014/main" id="{20F1788F-A5AE-4188-8274-F7F2E3833ECD}"/>
+              </a:ext>
+              <a:ext uri="{C183D7F6-B498-43B3-948B-1728B52AA6E4}">
+                <adec:decorative xmlns:adec="http://schemas.microsoft.com/office/drawing/2017/decorative" val="1"/>
+              </a:ext>
+            </a:extLst>
+          </p:cNvPr>
+          <p:cNvCxnSpPr>
+            <a:cxnSpLocks noGrp="1" noRot="1" noChangeAspect="1" noMove="1" noResize="1" noEditPoints="1" noAdjustHandles="1" noChangeArrowheads="1" noChangeShapeType="1"/>
+          </p:cNvCxnSpPr>
+          <p:nvPr>
+            <p:extLst>
+              <p:ext uri="{386F3935-93C4-4BCD-93E2-E3B085C9AB24}">
+                <p16:designElem xmlns:p16="http://schemas.microsoft.com/office/powerpoint/2015/main" val="1"/>
+              </p:ext>
+            </p:extLst>
+          </p:nvPr>
+        </p:nvCxnSpPr>
+        <p:spPr>
+          <a:xfrm>
+            <a:off x="7995920" y="1573887"/>
+            <a:ext cx="0" cy="3710227"/>
+          </a:xfrm>
+          <a:prstGeom prst="line">
+            <a:avLst/>
+          </a:prstGeom>
+          <a:ln w="19050">
+            <a:solidFill>
+              <a:srgbClr val="7F7F7F"/>
+            </a:solidFill>
+          </a:ln>
+        </p:spPr>
+        <p:style>
+          <a:lnRef idx="1">
+            <a:schemeClr val="accent1"/>
+          </a:lnRef>
+          <a:fillRef idx="0">
+            <a:schemeClr val="accent1"/>
+          </a:fillRef>
+          <a:effectRef idx="0">
+            <a:schemeClr val="accent1"/>
+          </a:effectRef>
+          <a:fontRef idx="minor">
+            <a:schemeClr val="tx1"/>
+          </a:fontRef>
+        </p:style>
+      </p:cxnSp>
+      <p:pic>
+        <p:nvPicPr>
+          <p:cNvPr id="3" name="Obraz 2">
+            <a:extLst>
+              <a:ext uri="{FF2B5EF4-FFF2-40B4-BE49-F238E27FC236}">
+                <a16:creationId xmlns:a16="http://schemas.microsoft.com/office/drawing/2014/main" id="{A8AEEA96-25A7-1C7A-817C-E13DDFDF24ED}"/>
+              </a:ext>
+            </a:extLst>
+          </p:cNvPr>
+          <p:cNvPicPr>
+            <a:picLocks noChangeAspect="1"/>
+          </p:cNvPicPr>
+          <p:nvPr/>
+        </p:nvPicPr>
+        <p:blipFill>
+          <a:blip r:embed="rId4"/>
+          <a:stretch>
+            <a:fillRect/>
+          </a:stretch>
+        </p:blipFill>
+        <p:spPr>
+          <a:xfrm>
+            <a:off x="8162336" y="1667368"/>
+            <a:ext cx="3517120" cy="3517120"/>
+          </a:xfrm>
+          <a:prstGeom prst="rect">
+            <a:avLst/>
+          </a:prstGeom>
+        </p:spPr>
+      </p:pic>
+      <p:sp>
+        <p:nvSpPr>
+          <p:cNvPr id="8" name="pole tekstowe 7">
+            <a:extLst>
+              <a:ext uri="{FF2B5EF4-FFF2-40B4-BE49-F238E27FC236}">
+                <a16:creationId xmlns:a16="http://schemas.microsoft.com/office/drawing/2014/main" id="{712B3F0B-80E7-D0A6-3BDC-22E06FED660E}"/>
+              </a:ext>
+            </a:extLst>
+          </p:cNvPr>
+          <p:cNvSpPr txBox="1"/>
+          <p:nvPr/>
+        </p:nvSpPr>
+        <p:spPr>
+          <a:xfrm>
+            <a:off x="1291493" y="1204555"/>
+            <a:ext cx="2478690" cy="369332"/>
+          </a:xfrm>
+          <a:prstGeom prst="rect">
+            <a:avLst/>
+          </a:prstGeom>
+          <a:noFill/>
+        </p:spPr>
+        <p:txBody>
+          <a:bodyPr wrap="square" rtlCol="0">
+            <a:spAutoFit/>
+          </a:bodyPr>
+          <a:lstStyle/>
+          <a:p>
+            <a:pPr algn="ctr"/>
+            <a:r>
+              <a:rPr lang="en-GB" dirty="0"/>
+              <a:t>Harmonic</a:t>
+            </a:r>
+          </a:p>
+        </p:txBody>
+      </p:sp>
+      <p:sp>
+        <p:nvSpPr>
+          <p:cNvPr id="9" name="pole tekstowe 8">
+            <a:extLst>
+              <a:ext uri="{FF2B5EF4-FFF2-40B4-BE49-F238E27FC236}">
+                <a16:creationId xmlns:a16="http://schemas.microsoft.com/office/drawing/2014/main" id="{F1B19D03-4145-2D45-28DE-DD696A493ACC}"/>
+              </a:ext>
+            </a:extLst>
+          </p:cNvPr>
+          <p:cNvSpPr txBox="1"/>
+          <p:nvPr/>
+        </p:nvSpPr>
+        <p:spPr>
+          <a:xfrm>
+            <a:off x="5121812" y="1204555"/>
+            <a:ext cx="2478690" cy="369332"/>
+          </a:xfrm>
+          <a:prstGeom prst="rect">
+            <a:avLst/>
+          </a:prstGeom>
+          <a:noFill/>
+        </p:spPr>
+        <p:txBody>
+          <a:bodyPr wrap="square" rtlCol="0">
+            <a:spAutoFit/>
+          </a:bodyPr>
+          <a:lstStyle/>
+          <a:p>
+            <a:pPr algn="ctr"/>
+            <a:r>
+              <a:rPr lang="en-GB" dirty="0"/>
+              <a:t>Flute</a:t>
+            </a:r>
+          </a:p>
+        </p:txBody>
+      </p:sp>
+      <p:sp>
+        <p:nvSpPr>
+          <p:cNvPr id="10" name="pole tekstowe 9">
+            <a:extLst>
+              <a:ext uri="{FF2B5EF4-FFF2-40B4-BE49-F238E27FC236}">
+                <a16:creationId xmlns:a16="http://schemas.microsoft.com/office/drawing/2014/main" id="{FDEAFFC3-0854-002B-D859-E4C37085C10C}"/>
+              </a:ext>
+            </a:extLst>
+          </p:cNvPr>
+          <p:cNvSpPr txBox="1"/>
+          <p:nvPr/>
+        </p:nvSpPr>
+        <p:spPr>
+          <a:xfrm>
+            <a:off x="8952131" y="1204555"/>
+            <a:ext cx="2478690" cy="369332"/>
+          </a:xfrm>
+          <a:prstGeom prst="rect">
+            <a:avLst/>
+          </a:prstGeom>
+          <a:noFill/>
+        </p:spPr>
+        <p:txBody>
+          <a:bodyPr wrap="square" rtlCol="0">
+            <a:spAutoFit/>
+          </a:bodyPr>
+          <a:lstStyle/>
+          <a:p>
+            <a:pPr algn="ctr"/>
+            <a:r>
+              <a:rPr lang="en-GB" dirty="0"/>
+              <a:t>Viola</a:t>
+            </a:r>
+          </a:p>
+        </p:txBody>
+      </p:sp>
+    </p:spTree>
+    <p:extLst>
+      <p:ext uri="{BB962C8B-B14F-4D97-AF65-F5344CB8AC3E}">
+        <p14:creationId xmlns:p14="http://schemas.microsoft.com/office/powerpoint/2010/main" val="3930952448"/>
       </p:ext>
     </p:extLst>
   </p:cSld>
